--- a/SUGAR_GLIDER_CAGE_EXECUTIVE_PRESENTATION.pptx
+++ b/SUGAR_GLIDER_CAGE_EXECUTIVE_PRESENTATION.pptx
@@ -1527,6 +1527,10 @@
           </a:solidFill>
           <a:ln/>
         </p:spPr>
+        <p:txBody>
+          <a:bodyPr/>
+          <a:p/>
+        </p:txBody>
       </p:sp>
       <p:sp>
         <p:nvSpPr>
@@ -1591,6 +1595,10 @@
             <a:prstDash val="solid"/>
           </a:ln>
         </p:spPr>
+        <p:txBody>
+          <a:bodyPr/>
+          <a:p/>
+        </p:txBody>
       </p:sp>
       <p:sp>
         <p:nvSpPr>
@@ -1694,6 +1702,10 @@
             <a:prstDash val="solid"/>
           </a:ln>
         </p:spPr>
+        <p:txBody>
+          <a:bodyPr/>
+          <a:p/>
+        </p:txBody>
       </p:sp>
       <p:sp>
         <p:nvSpPr>
@@ -1797,6 +1809,10 @@
             <a:prstDash val="solid"/>
           </a:ln>
         </p:spPr>
+        <p:txBody>
+          <a:bodyPr/>
+          <a:p/>
+        </p:txBody>
       </p:sp>
       <p:sp>
         <p:nvSpPr>
@@ -1900,6 +1916,10 @@
             <a:prstDash val="solid"/>
           </a:ln>
         </p:spPr>
+        <p:txBody>
+          <a:bodyPr/>
+          <a:p/>
+        </p:txBody>
       </p:sp>
       <p:sp>
         <p:nvSpPr>
@@ -2069,6 +2089,10 @@
           </a:solidFill>
           <a:ln/>
         </p:spPr>
+        <p:txBody>
+          <a:bodyPr/>
+          <a:p/>
+        </p:txBody>
       </p:sp>
       <p:sp>
         <p:nvSpPr>
@@ -2103,7 +2127,7 @@
                 <a:ea typeface="Calibri" pitchFamily="34" charset="-122"/>
                 <a:cs typeface="Calibri" pitchFamily="34" charset="-120"/>
               </a:rPr>
-              <a:t>48" × 32" × 32" overall dimensions</a:t>
+              <a:t>55⅜" × 36⅞" × 54" overall dimensions</a:t>
             </a:r>
             <a:endParaRPr lang="en-US" sz="1200" dirty="0"/>
           </a:p>
@@ -2328,6 +2352,10 @@
             <a:prstDash val="solid"/>
           </a:ln>
         </p:spPr>
+        <p:txBody>
+          <a:bodyPr/>
+          <a:p/>
+        </p:txBody>
       </p:sp>
       <p:sp>
         <p:nvSpPr>
@@ -2653,6 +2681,10 @@
           </a:solidFill>
           <a:ln/>
         </p:spPr>
+        <p:txBody>
+          <a:bodyPr/>
+          <a:p/>
+        </p:txBody>
       </p:sp>
       <p:sp>
         <p:nvSpPr>
@@ -2678,6 +2710,10 @@
             <a:prstDash val="solid"/>
           </a:ln>
         </p:spPr>
+        <p:txBody>
+          <a:bodyPr/>
+          <a:p/>
+        </p:txBody>
       </p:sp>
       <p:sp>
         <p:nvSpPr>
@@ -2742,6 +2778,10 @@
             <a:prstDash val="solid"/>
           </a:ln>
         </p:spPr>
+        <p:txBody>
+          <a:bodyPr/>
+          <a:p/>
+        </p:txBody>
       </p:sp>
       <p:sp>
         <p:nvSpPr>
@@ -2806,6 +2846,10 @@
             <a:prstDash val="solid"/>
           </a:ln>
         </p:spPr>
+        <p:txBody>
+          <a:bodyPr/>
+          <a:p/>
+        </p:txBody>
       </p:sp>
       <p:sp>
         <p:nvSpPr>
@@ -2870,6 +2914,10 @@
             <a:prstDash val="solid"/>
           </a:ln>
         </p:spPr>
+        <p:txBody>
+          <a:bodyPr/>
+          <a:p/>
+        </p:txBody>
       </p:sp>
       <p:sp>
         <p:nvSpPr>
@@ -2934,6 +2982,10 @@
             <a:prstDash val="solid"/>
           </a:ln>
         </p:spPr>
+        <p:txBody>
+          <a:bodyPr/>
+          <a:p/>
+        </p:txBody>
       </p:sp>
       <p:sp>
         <p:nvSpPr>
@@ -2998,6 +3050,10 @@
             <a:prstDash val="solid"/>
           </a:ln>
         </p:spPr>
+        <p:txBody>
+          <a:bodyPr/>
+          <a:p/>
+        </p:txBody>
       </p:sp>
       <p:sp>
         <p:nvSpPr>
@@ -3128,6 +3184,10 @@
           </a:solidFill>
           <a:ln/>
         </p:spPr>
+        <p:txBody>
+          <a:bodyPr/>
+          <a:p/>
+        </p:txBody>
       </p:sp>
       <p:sp>
         <p:nvSpPr>
